--- a/public/downloads/praesentation/M08.pptx
+++ b/public/downloads/praesentation/M08.pptx
@@ -4212,7 +4212,7 @@
                   </a:txBody>
                   <a:tcPr>
                     <a:solidFill>
-                      <a:srgbClr val="191D2E"/>
+                      <a:srgbClr val="1F2B56"/>
                     </a:solidFill>
                   </a:tcPr>
                 </a:tc>
@@ -4234,7 +4234,7 @@
                   </a:txBody>
                   <a:tcPr>
                     <a:solidFill>
-                      <a:srgbClr val="191D2E"/>
+                      <a:srgbClr val="1F2B56"/>
                     </a:solidFill>
                   </a:tcPr>
                 </a:tc>
@@ -4256,7 +4256,7 @@
                   </a:txBody>
                   <a:tcPr>
                     <a:solidFill>
-                      <a:srgbClr val="191D2E"/>
+                      <a:srgbClr val="1F2B56"/>
                     </a:solidFill>
                   </a:tcPr>
                 </a:tc>
@@ -8021,7 +8021,7 @@
                   </a:txBody>
                   <a:tcPr>
                     <a:solidFill>
-                      <a:srgbClr val="191D2E"/>
+                      <a:srgbClr val="1F2B56"/>
                     </a:solidFill>
                   </a:tcPr>
                 </a:tc>
@@ -8043,7 +8043,7 @@
                   </a:txBody>
                   <a:tcPr>
                     <a:solidFill>
-                      <a:srgbClr val="191D2E"/>
+                      <a:srgbClr val="1F2B56"/>
                     </a:solidFill>
                   </a:tcPr>
                 </a:tc>
@@ -8571,7 +8571,7 @@
                   </a:txBody>
                   <a:tcPr>
                     <a:solidFill>
-                      <a:srgbClr val="191D2E"/>
+                      <a:srgbClr val="1F2B56"/>
                     </a:solidFill>
                   </a:tcPr>
                 </a:tc>
@@ -8593,7 +8593,7 @@
                   </a:txBody>
                   <a:tcPr>
                     <a:solidFill>
-                      <a:srgbClr val="191D2E"/>
+                      <a:srgbClr val="1F2B56"/>
                     </a:solidFill>
                   </a:tcPr>
                 </a:tc>
@@ -8615,7 +8615,7 @@
                   </a:txBody>
                   <a:tcPr>
                     <a:solidFill>
-                      <a:srgbClr val="191D2E"/>
+                      <a:srgbClr val="1F2B56"/>
                     </a:solidFill>
                   </a:tcPr>
                 </a:tc>
@@ -8637,7 +8637,7 @@
                   </a:txBody>
                   <a:tcPr>
                     <a:solidFill>
-                      <a:srgbClr val="191D2E"/>
+                      <a:srgbClr val="1F2B56"/>
                     </a:solidFill>
                   </a:tcPr>
                 </a:tc>
@@ -8659,7 +8659,7 @@
                   </a:txBody>
                   <a:tcPr>
                     <a:solidFill>
-                      <a:srgbClr val="191D2E"/>
+                      <a:srgbClr val="1F2B56"/>
                     </a:solidFill>
                   </a:tcPr>
                 </a:tc>
@@ -8681,7 +8681,7 @@
                   </a:txBody>
                   <a:tcPr>
                     <a:solidFill>
-                      <a:srgbClr val="191D2E"/>
+                      <a:srgbClr val="1F2B56"/>
                     </a:solidFill>
                   </a:tcPr>
                 </a:tc>
@@ -13030,29 +13030,29 @@
         </p:nvSpPr>
         <p:spPr>
           <a:xfrm>
-            <a:off x="4064000" y="927100"/>
-            <a:ext cx="508000" cy="647700"/>
-          </a:xfrm>
-          <a:prstGeom prst="rect">
-            <a:avLst/>
-          </a:prstGeom>
-          <a:noFill/>
-        </p:spPr>
-        <p:txBody>
-          <a:bodyPr wrap="square">
+            <a:off x="4064000" y="939799"/>
+            <a:ext cx="762000" cy="647700"/>
+          </a:xfrm>
+          <a:prstGeom prst="rect">
+            <a:avLst/>
+          </a:prstGeom>
+          <a:noFill/>
+        </p:spPr>
+        <p:txBody>
+          <a:bodyPr wrap="none">
             <a:normAutofit/>
           </a:bodyPr>
           <a:lstStyle/>
           <a:p>
             <a:pPr algn="l"/>
             <a:r>
-              <a:rPr sz="2600" b="0" i="1">
+              <a:rPr sz="2400" b="0" i="1">
                 <a:solidFill>
                   <a:srgbClr val="1F2B56"/>
                 </a:solidFill>
                 <a:latin typeface="Georgia"/>
               </a:rPr>
-              <a:t>I.</a:t>
+              <a:t>I</a:t>
             </a:r>
           </a:p>
         </p:txBody>
@@ -13065,8 +13065,8 @@
         </p:nvSpPr>
         <p:spPr>
           <a:xfrm>
-            <a:off x="4699000" y="952500"/>
-            <a:ext cx="6858000" cy="622300"/>
+            <a:off x="4953000" y="952500"/>
+            <a:ext cx="6629400" cy="635000"/>
           </a:xfrm>
           <a:prstGeom prst="rect">
             <a:avLst/>
@@ -13100,7 +13100,7 @@
         </p:nvSpPr>
         <p:spPr>
           <a:xfrm>
-            <a:off x="4064000" y="1574800"/>
+            <a:off x="4064000" y="1587500"/>
             <a:ext cx="7518399" cy="6350"/>
           </a:xfrm>
           <a:prstGeom prst="rect">
@@ -13143,29 +13143,29 @@
         </p:nvSpPr>
         <p:spPr>
           <a:xfrm>
-            <a:off x="4064000" y="1612900"/>
-            <a:ext cx="508000" cy="647700"/>
-          </a:xfrm>
-          <a:prstGeom prst="rect">
-            <a:avLst/>
-          </a:prstGeom>
-          <a:noFill/>
-        </p:spPr>
-        <p:txBody>
-          <a:bodyPr wrap="square">
+            <a:off x="4064000" y="1638300"/>
+            <a:ext cx="762000" cy="647700"/>
+          </a:xfrm>
+          <a:prstGeom prst="rect">
+            <a:avLst/>
+          </a:prstGeom>
+          <a:noFill/>
+        </p:spPr>
+        <p:txBody>
+          <a:bodyPr wrap="none">
             <a:normAutofit/>
           </a:bodyPr>
           <a:lstStyle/>
           <a:p>
             <a:pPr algn="l"/>
             <a:r>
-              <a:rPr sz="2600" b="0" i="1">
+              <a:rPr sz="2400" b="0" i="1">
                 <a:solidFill>
                   <a:srgbClr val="1F2B56"/>
                 </a:solidFill>
                 <a:latin typeface="Georgia"/>
               </a:rPr>
-              <a:t>II.</a:t>
+              <a:t>II</a:t>
             </a:r>
           </a:p>
         </p:txBody>
@@ -13178,8 +13178,8 @@
         </p:nvSpPr>
         <p:spPr>
           <a:xfrm>
-            <a:off x="4699000" y="1638300"/>
-            <a:ext cx="6858000" cy="622300"/>
+            <a:off x="4953000" y="1651000"/>
+            <a:ext cx="6629400" cy="635000"/>
           </a:xfrm>
           <a:prstGeom prst="rect">
             <a:avLst/>
@@ -13213,7 +13213,7 @@
         </p:nvSpPr>
         <p:spPr>
           <a:xfrm>
-            <a:off x="4064000" y="2260600"/>
+            <a:off x="4064000" y="2286000"/>
             <a:ext cx="7518399" cy="6350"/>
           </a:xfrm>
           <a:prstGeom prst="rect">
@@ -13256,29 +13256,29 @@
         </p:nvSpPr>
         <p:spPr>
           <a:xfrm>
-            <a:off x="4064000" y="2298700"/>
-            <a:ext cx="508000" cy="647700"/>
-          </a:xfrm>
-          <a:prstGeom prst="rect">
-            <a:avLst/>
-          </a:prstGeom>
-          <a:noFill/>
-        </p:spPr>
-        <p:txBody>
-          <a:bodyPr wrap="square">
+            <a:off x="4064000" y="2336800"/>
+            <a:ext cx="762000" cy="647700"/>
+          </a:xfrm>
+          <a:prstGeom prst="rect">
+            <a:avLst/>
+          </a:prstGeom>
+          <a:noFill/>
+        </p:spPr>
+        <p:txBody>
+          <a:bodyPr wrap="none">
             <a:normAutofit/>
           </a:bodyPr>
           <a:lstStyle/>
           <a:p>
             <a:pPr algn="l"/>
             <a:r>
-              <a:rPr sz="2600" b="0" i="1">
+              <a:rPr sz="2400" b="0" i="1">
                 <a:solidFill>
                   <a:srgbClr val="1F2B56"/>
                 </a:solidFill>
                 <a:latin typeface="Georgia"/>
               </a:rPr>
-              <a:t>III.</a:t>
+              <a:t>III</a:t>
             </a:r>
           </a:p>
         </p:txBody>
@@ -13291,8 +13291,8 @@
         </p:nvSpPr>
         <p:spPr>
           <a:xfrm>
-            <a:off x="4699000" y="2324100"/>
-            <a:ext cx="6858000" cy="622300"/>
+            <a:off x="4953000" y="2349500"/>
+            <a:ext cx="6629400" cy="635000"/>
           </a:xfrm>
           <a:prstGeom prst="rect">
             <a:avLst/>
@@ -13326,7 +13326,7 @@
         </p:nvSpPr>
         <p:spPr>
           <a:xfrm>
-            <a:off x="4064000" y="2946400"/>
+            <a:off x="4064000" y="2984500"/>
             <a:ext cx="7518399" cy="6350"/>
           </a:xfrm>
           <a:prstGeom prst="rect">
@@ -13369,29 +13369,29 @@
         </p:nvSpPr>
         <p:spPr>
           <a:xfrm>
-            <a:off x="4064000" y="2984500"/>
-            <a:ext cx="508000" cy="647700"/>
-          </a:xfrm>
-          <a:prstGeom prst="rect">
-            <a:avLst/>
-          </a:prstGeom>
-          <a:noFill/>
-        </p:spPr>
-        <p:txBody>
-          <a:bodyPr wrap="square">
+            <a:off x="4064000" y="3035300"/>
+            <a:ext cx="762000" cy="647700"/>
+          </a:xfrm>
+          <a:prstGeom prst="rect">
+            <a:avLst/>
+          </a:prstGeom>
+          <a:noFill/>
+        </p:spPr>
+        <p:txBody>
+          <a:bodyPr wrap="none">
             <a:normAutofit/>
           </a:bodyPr>
           <a:lstStyle/>
           <a:p>
             <a:pPr algn="l"/>
             <a:r>
-              <a:rPr sz="2600" b="0" i="1">
+              <a:rPr sz="2400" b="0" i="1">
                 <a:solidFill>
                   <a:srgbClr val="1F2B56"/>
                 </a:solidFill>
                 <a:latin typeface="Georgia"/>
               </a:rPr>
-              <a:t>IV.</a:t>
+              <a:t>IV</a:t>
             </a:r>
           </a:p>
         </p:txBody>
@@ -13404,8 +13404,8 @@
         </p:nvSpPr>
         <p:spPr>
           <a:xfrm>
-            <a:off x="4699000" y="3009900"/>
-            <a:ext cx="6858000" cy="622300"/>
+            <a:off x="4953000" y="3048000"/>
+            <a:ext cx="6629400" cy="635000"/>
           </a:xfrm>
           <a:prstGeom prst="rect">
             <a:avLst/>
@@ -13439,7 +13439,7 @@
         </p:nvSpPr>
         <p:spPr>
           <a:xfrm>
-            <a:off x="4064000" y="3632200"/>
+            <a:off x="4064000" y="3683000"/>
             <a:ext cx="7518399" cy="6350"/>
           </a:xfrm>
           <a:prstGeom prst="rect">
@@ -13482,29 +13482,29 @@
         </p:nvSpPr>
         <p:spPr>
           <a:xfrm>
-            <a:off x="4064000" y="3670300"/>
-            <a:ext cx="508000" cy="647700"/>
-          </a:xfrm>
-          <a:prstGeom prst="rect">
-            <a:avLst/>
-          </a:prstGeom>
-          <a:noFill/>
-        </p:spPr>
-        <p:txBody>
-          <a:bodyPr wrap="square">
+            <a:off x="4064000" y="3733799"/>
+            <a:ext cx="762000" cy="647700"/>
+          </a:xfrm>
+          <a:prstGeom prst="rect">
+            <a:avLst/>
+          </a:prstGeom>
+          <a:noFill/>
+        </p:spPr>
+        <p:txBody>
+          <a:bodyPr wrap="none">
             <a:normAutofit/>
           </a:bodyPr>
           <a:lstStyle/>
           <a:p>
             <a:pPr algn="l"/>
             <a:r>
-              <a:rPr sz="2600" b="0" i="1">
+              <a:rPr sz="2400" b="0" i="1">
                 <a:solidFill>
                   <a:srgbClr val="1F2B56"/>
                 </a:solidFill>
                 <a:latin typeface="Georgia"/>
               </a:rPr>
-              <a:t>V.</a:t>
+              <a:t>V</a:t>
             </a:r>
           </a:p>
         </p:txBody>
@@ -13517,8 +13517,8 @@
         </p:nvSpPr>
         <p:spPr>
           <a:xfrm>
-            <a:off x="4699000" y="3695700"/>
-            <a:ext cx="6858000" cy="622300"/>
+            <a:off x="4953000" y="3746500"/>
+            <a:ext cx="6629400" cy="635000"/>
           </a:xfrm>
           <a:prstGeom prst="rect">
             <a:avLst/>
@@ -14149,7 +14149,7 @@
     <p:bg>
       <p:bgPr>
         <a:solidFill>
-          <a:srgbClr val="191D2E"/>
+          <a:srgbClr val="1F2B56"/>
         </a:solidFill>
         <a:effectLst/>
       </p:bgPr>
@@ -15484,7 +15484,7 @@
         <p:spPr>
           <a:xfrm>
             <a:off x="609600" y="920750"/>
-            <a:ext cx="10972800" cy="1778000"/>
+            <a:ext cx="4826000" cy="1778000"/>
           </a:xfrm>
           <a:prstGeom prst="rect">
             <a:avLst/>
@@ -15512,57 +15512,14 @@
       </p:sp>
       <p:sp>
         <p:nvSpPr>
-          <p:cNvPr id="7" name="Rectangle 6"/>
-          <p:cNvSpPr/>
-          <p:nvPr/>
-        </p:nvSpPr>
-        <p:spPr>
-          <a:xfrm>
-            <a:off x="609600" y="2762250"/>
-            <a:ext cx="10972800" cy="6350"/>
-          </a:xfrm>
-          <a:prstGeom prst="rect">
-            <a:avLst/>
-          </a:prstGeom>
-          <a:solidFill>
-            <a:srgbClr val="E0E0E8"/>
-          </a:solidFill>
-          <a:ln>
-            <a:noFill/>
-          </a:ln>
-        </p:spPr>
-        <p:style>
-          <a:lnRef idx="1">
-            <a:schemeClr val="accent1"/>
-          </a:lnRef>
-          <a:fillRef idx="3">
-            <a:schemeClr val="accent1"/>
-          </a:fillRef>
-          <a:effectRef idx="2">
-            <a:schemeClr val="accent1"/>
-          </a:effectRef>
-          <a:fontRef idx="minor">
-            <a:schemeClr val="lt1"/>
-          </a:fontRef>
-        </p:style>
-        <p:txBody>
-          <a:bodyPr rtlCol="0" anchor="ctr"/>
-          <a:lstStyle/>
-          <a:p>
-            <a:pPr algn="ctr"/>
-          </a:p>
-        </p:txBody>
-      </p:sp>
-      <p:sp>
-        <p:nvSpPr>
-          <p:cNvPr id="8" name="TextBox 7"/>
-          <p:cNvSpPr txBox="1"/>
-          <p:nvPr/>
-        </p:nvSpPr>
-        <p:spPr>
-          <a:xfrm>
-            <a:off x="609600" y="2876550"/>
-            <a:ext cx="254000" cy="355600"/>
+          <p:cNvPr id="7" name="TextBox 6"/>
+          <p:cNvSpPr txBox="1"/>
+          <p:nvPr/>
+        </p:nvSpPr>
+        <p:spPr>
+          <a:xfrm>
+            <a:off x="609600" y="2825750"/>
+            <a:ext cx="4826000" cy="1016000"/>
           </a:xfrm>
           <a:prstGeom prst="rect">
             <a:avLst/>
@@ -15577,321 +15534,1764 @@
           <a:p>
             <a:pPr algn="l"/>
             <a:r>
-              <a:rPr sz="2200" b="0" i="0">
-                <a:solidFill>
-                  <a:srgbClr val="1F2B56"/>
+              <a:rPr sz="1400" b="0" i="0">
+                <a:solidFill>
+                  <a:srgbClr val="4D5270"/>
                 </a:solidFill>
                 <a:latin typeface="Georgia"/>
               </a:rPr>
-              <a:t>–</a:t>
-            </a:r>
-          </a:p>
-        </p:txBody>
-      </p:sp>
-      <p:sp>
-        <p:nvSpPr>
-          <p:cNvPr id="9" name="TextBox 8"/>
-          <p:cNvSpPr txBox="1"/>
-          <p:nvPr/>
-        </p:nvSpPr>
-        <p:spPr>
-          <a:xfrm>
-            <a:off x="939799" y="2851150"/>
-            <a:ext cx="10642600" cy="508000"/>
-          </a:xfrm>
-          <a:prstGeom prst="rect">
-            <a:avLst/>
-          </a:prstGeom>
-          <a:noFill/>
-        </p:spPr>
-        <p:txBody>
-          <a:bodyPr wrap="square">
-            <a:normAutofit/>
-          </a:bodyPr>
-          <a:lstStyle/>
-          <a:p>
-            <a:pPr algn="l"/>
-            <a:r>
-              <a:rPr sz="1400" b="0" i="0">
-                <a:solidFill>
-                  <a:srgbClr val="191D2E"/>
-                </a:solidFill>
-                <a:latin typeface="Georgia"/>
-              </a:rPr>
-              <a:t>Ø 4,0–5,0: Sparring-Niveau erreicht. Bereit für M09 (Branchenexperte) oder M21 (Kreditentscheidung).</a:t>
-            </a:r>
-          </a:p>
-        </p:txBody>
-      </p:sp>
-      <p:sp>
-        <p:nvSpPr>
-          <p:cNvPr id="10" name="Rectangle 9"/>
-          <p:cNvSpPr/>
-          <p:nvPr/>
-        </p:nvSpPr>
-        <p:spPr>
-          <a:xfrm>
-            <a:off x="939799" y="3333750"/>
-            <a:ext cx="10642600" cy="6350"/>
-          </a:xfrm>
-          <a:prstGeom prst="rect">
-            <a:avLst/>
-          </a:prstGeom>
-          <a:solidFill>
-            <a:srgbClr val="E0E0E8"/>
-          </a:solidFill>
-          <a:ln>
-            <a:noFill/>
-          </a:ln>
-        </p:spPr>
-        <p:style>
-          <a:lnRef idx="1">
-            <a:schemeClr val="accent1"/>
-          </a:lnRef>
-          <a:fillRef idx="3">
-            <a:schemeClr val="accent1"/>
-          </a:fillRef>
-          <a:effectRef idx="2">
-            <a:schemeClr val="accent1"/>
-          </a:effectRef>
-          <a:fontRef idx="minor">
-            <a:schemeClr val="lt1"/>
-          </a:fontRef>
-        </p:style>
-        <p:txBody>
-          <a:bodyPr rtlCol="0" anchor="ctr"/>
-          <a:lstStyle/>
-          <a:p>
-            <a:pPr algn="ctr"/>
-          </a:p>
-        </p:txBody>
-      </p:sp>
-      <p:sp>
-        <p:nvSpPr>
-          <p:cNvPr id="11" name="TextBox 10"/>
-          <p:cNvSpPr txBox="1"/>
-          <p:nvPr/>
-        </p:nvSpPr>
-        <p:spPr>
-          <a:xfrm>
-            <a:off x="609600" y="3409950"/>
-            <a:ext cx="254000" cy="355600"/>
-          </a:xfrm>
-          <a:prstGeom prst="rect">
-            <a:avLst/>
-          </a:prstGeom>
-          <a:noFill/>
-        </p:spPr>
-        <p:txBody>
-          <a:bodyPr wrap="square">
-            <a:normAutofit/>
-          </a:bodyPr>
-          <a:lstStyle/>
-          <a:p>
-            <a:pPr algn="l"/>
-            <a:r>
-              <a:rPr sz="2200" b="0" i="0">
-                <a:solidFill>
-                  <a:srgbClr val="1F2B56"/>
-                </a:solidFill>
-                <a:latin typeface="Georgia"/>
-              </a:rPr>
-              <a:t>–</a:t>
-            </a:r>
-          </a:p>
-        </p:txBody>
-      </p:sp>
-      <p:sp>
-        <p:nvSpPr>
-          <p:cNvPr id="12" name="TextBox 11"/>
-          <p:cNvSpPr txBox="1"/>
-          <p:nvPr/>
-        </p:nvSpPr>
-        <p:spPr>
-          <a:xfrm>
-            <a:off x="939799" y="3384550"/>
-            <a:ext cx="10642600" cy="508000"/>
-          </a:xfrm>
-          <a:prstGeom prst="rect">
-            <a:avLst/>
-          </a:prstGeom>
-          <a:noFill/>
-        </p:spPr>
-        <p:txBody>
-          <a:bodyPr wrap="square">
-            <a:normAutofit/>
-          </a:bodyPr>
-          <a:lstStyle/>
-          <a:p>
-            <a:pPr algn="l"/>
-            <a:r>
-              <a:rPr sz="1400" b="0" i="0">
-                <a:solidFill>
-                  <a:srgbClr val="191D2E"/>
-                </a:solidFill>
-                <a:latin typeface="Georgia"/>
-              </a:rPr>
-              <a:t>Ø 3,0–3,9: Grundlagen sitzen, Anwendungssicherheit ausbaufähig. Praxiscase nochmals durchrechnen.</a:t>
-            </a:r>
-          </a:p>
-        </p:txBody>
-      </p:sp>
-      <p:sp>
-        <p:nvSpPr>
-          <p:cNvPr id="13" name="Rectangle 12"/>
-          <p:cNvSpPr/>
-          <p:nvPr/>
-        </p:nvSpPr>
-        <p:spPr>
-          <a:xfrm>
-            <a:off x="939799" y="3867150"/>
-            <a:ext cx="10642600" cy="6350"/>
-          </a:xfrm>
-          <a:prstGeom prst="rect">
-            <a:avLst/>
-          </a:prstGeom>
-          <a:solidFill>
-            <a:srgbClr val="E0E0E8"/>
-          </a:solidFill>
-          <a:ln>
-            <a:noFill/>
-          </a:ln>
-        </p:spPr>
-        <p:style>
-          <a:lnRef idx="1">
-            <a:schemeClr val="accent1"/>
-          </a:lnRef>
-          <a:fillRef idx="3">
-            <a:schemeClr val="accent1"/>
-          </a:fillRef>
-          <a:effectRef idx="2">
-            <a:schemeClr val="accent1"/>
-          </a:effectRef>
-          <a:fontRef idx="minor">
-            <a:schemeClr val="lt1"/>
-          </a:fontRef>
-        </p:style>
-        <p:txBody>
-          <a:bodyPr rtlCol="0" anchor="ctr"/>
-          <a:lstStyle/>
-          <a:p>
-            <a:pPr algn="ctr"/>
-          </a:p>
-        </p:txBody>
-      </p:sp>
-      <p:sp>
-        <p:nvSpPr>
-          <p:cNvPr id="14" name="TextBox 13"/>
-          <p:cNvSpPr txBox="1"/>
-          <p:nvPr/>
-        </p:nvSpPr>
-        <p:spPr>
-          <a:xfrm>
-            <a:off x="609600" y="3943350"/>
-            <a:ext cx="254000" cy="355600"/>
-          </a:xfrm>
-          <a:prstGeom prst="rect">
-            <a:avLst/>
-          </a:prstGeom>
-          <a:noFill/>
-        </p:spPr>
-        <p:txBody>
-          <a:bodyPr wrap="square">
-            <a:normAutofit/>
-          </a:bodyPr>
-          <a:lstStyle/>
-          <a:p>
-            <a:pPr algn="l"/>
-            <a:r>
-              <a:rPr sz="2200" b="0" i="0">
-                <a:solidFill>
-                  <a:srgbClr val="1F2B56"/>
-                </a:solidFill>
-                <a:latin typeface="Georgia"/>
-              </a:rPr>
-              <a:t>–</a:t>
-            </a:r>
-          </a:p>
-        </p:txBody>
-      </p:sp>
-      <p:sp>
-        <p:nvSpPr>
-          <p:cNvPr id="15" name="TextBox 14"/>
-          <p:cNvSpPr txBox="1"/>
-          <p:nvPr/>
-        </p:nvSpPr>
-        <p:spPr>
-          <a:xfrm>
-            <a:off x="939799" y="3917950"/>
-            <a:ext cx="10642600" cy="508000"/>
-          </a:xfrm>
-          <a:prstGeom prst="rect">
-            <a:avLst/>
-          </a:prstGeom>
-          <a:noFill/>
-        </p:spPr>
-        <p:txBody>
-          <a:bodyPr wrap="square">
-            <a:normAutofit/>
-          </a:bodyPr>
-          <a:lstStyle/>
-          <a:p>
-            <a:pPr algn="l"/>
-            <a:r>
-              <a:rPr sz="1400" b="0" i="0">
-                <a:solidFill>
-                  <a:srgbClr val="191D2E"/>
-                </a:solidFill>
-                <a:latin typeface="Georgia"/>
-              </a:rPr>
-              <a:t>Ø &lt; 3,0: Theorie-Inputs 2 und 3 (BelWertV, Kennzahlen) wiederholen. Rechenübungen mit einem Kollegen durchführen.</a:t>
-            </a:r>
-          </a:p>
-        </p:txBody>
-      </p:sp>
-      <p:sp>
-        <p:nvSpPr>
-          <p:cNvPr id="16" name="Rectangle 15"/>
-          <p:cNvSpPr/>
-          <p:nvPr/>
-        </p:nvSpPr>
-        <p:spPr>
-          <a:xfrm>
-            <a:off x="939799" y="4400550"/>
-            <a:ext cx="10642600" cy="6350"/>
-          </a:xfrm>
-          <a:prstGeom prst="rect">
-            <a:avLst/>
-          </a:prstGeom>
-          <a:solidFill>
-            <a:srgbClr val="E0E0E8"/>
-          </a:solidFill>
-          <a:ln>
-            <a:noFill/>
-          </a:ln>
-        </p:spPr>
-        <p:style>
-          <a:lnRef idx="1">
-            <a:schemeClr val="accent1"/>
-          </a:lnRef>
-          <a:fillRef idx="3">
-            <a:schemeClr val="accent1"/>
-          </a:fillRef>
-          <a:effectRef idx="2">
-            <a:schemeClr val="accent1"/>
-          </a:effectRef>
-          <a:fontRef idx="minor">
-            <a:schemeClr val="lt1"/>
-          </a:fontRef>
-        </p:style>
-        <p:txBody>
-          <a:bodyPr rtlCol="0" anchor="ctr"/>
-          <a:lstStyle/>
-          <a:p>
-            <a:pPr algn="ctr"/>
-          </a:p>
-        </p:txBody>
-      </p:sp>
+              <a:t>Bewerten Sie sich selbst auf einer Skala von 1 (trifft nicht zu) bis 5 (trifft voll zu):</a:t>
+            </a:r>
+          </a:p>
+        </p:txBody>
+      </p:sp>
+      <p:graphicFrame>
+        <p:nvGraphicFramePr>
+          <p:cNvPr id="8" name="Table 7"/>
+          <p:cNvGraphicFramePr>
+            <a:graphicFrameLocks noGrp="1"/>
+          </p:cNvGraphicFramePr>
+          <p:nvPr/>
+        </p:nvGraphicFramePr>
+        <p:xfrm>
+          <a:off x="5715000" y="920750"/>
+          <a:ext cx="5867400" cy="4190999"/>
+        </p:xfrm>
+        <a:graphic>
+          <a:graphicData uri="http://schemas.openxmlformats.org/drawingml/2006/table">
+            <a:tbl>
+              <a:tblPr firstRow="1" bandRow="1">
+                <a:tableStyleId>{5C22544A-7EE6-4342-B048-85BDC9FD1C3A}</a:tableStyleId>
+              </a:tblPr>
+              <a:tblGrid>
+                <a:gridCol w="838200"/>
+                <a:gridCol w="838200"/>
+                <a:gridCol w="838200"/>
+                <a:gridCol w="838200"/>
+                <a:gridCol w="838200"/>
+                <a:gridCol w="838200"/>
+                <a:gridCol w="838200"/>
+              </a:tblGrid>
+              <a:tr h="380999">
+                <a:tc>
+                  <a:txBody>
+                    <a:bodyPr wrap="square"/>
+                    <a:lstStyle/>
+                    <a:p>
+                      <a:r>
+                        <a:rPr sz="1000" b="1">
+                          <a:solidFill>
+                            <a:srgbClr val="F8F8FA"/>
+                          </a:solidFill>
+                          <a:latin typeface="Courier New"/>
+                        </a:rPr>
+                        <a:t>Aussage</a:t>
+                      </a:r>
+                    </a:p>
+                  </a:txBody>
+                  <a:tcPr>
+                    <a:solidFill>
+                      <a:srgbClr val="1F2B56"/>
+                    </a:solidFill>
+                  </a:tcPr>
+                </a:tc>
+                <a:tc>
+                  <a:txBody>
+                    <a:bodyPr wrap="square"/>
+                    <a:lstStyle/>
+                    <a:p>
+                      <a:r>
+                        <a:rPr sz="1000" b="1">
+                          <a:solidFill>
+                            <a:srgbClr val="F8F8FA"/>
+                          </a:solidFill>
+                          <a:latin typeface="Courier New"/>
+                        </a:rPr>
+                        <a:t>1</a:t>
+                      </a:r>
+                    </a:p>
+                  </a:txBody>
+                  <a:tcPr>
+                    <a:solidFill>
+                      <a:srgbClr val="1F2B56"/>
+                    </a:solidFill>
+                  </a:tcPr>
+                </a:tc>
+                <a:tc>
+                  <a:txBody>
+                    <a:bodyPr wrap="square"/>
+                    <a:lstStyle/>
+                    <a:p>
+                      <a:r>
+                        <a:rPr sz="1000" b="1">
+                          <a:solidFill>
+                            <a:srgbClr val="F8F8FA"/>
+                          </a:solidFill>
+                          <a:latin typeface="Courier New"/>
+                        </a:rPr>
+                        <a:t>2</a:t>
+                      </a:r>
+                    </a:p>
+                  </a:txBody>
+                  <a:tcPr>
+                    <a:solidFill>
+                      <a:srgbClr val="1F2B56"/>
+                    </a:solidFill>
+                  </a:tcPr>
+                </a:tc>
+                <a:tc>
+                  <a:txBody>
+                    <a:bodyPr wrap="square"/>
+                    <a:lstStyle/>
+                    <a:p>
+                      <a:r>
+                        <a:rPr sz="1000" b="1">
+                          <a:solidFill>
+                            <a:srgbClr val="F8F8FA"/>
+                          </a:solidFill>
+                          <a:latin typeface="Courier New"/>
+                        </a:rPr>
+                        <a:t>3</a:t>
+                      </a:r>
+                    </a:p>
+                  </a:txBody>
+                  <a:tcPr>
+                    <a:solidFill>
+                      <a:srgbClr val="1F2B56"/>
+                    </a:solidFill>
+                  </a:tcPr>
+                </a:tc>
+                <a:tc>
+                  <a:txBody>
+                    <a:bodyPr wrap="square"/>
+                    <a:lstStyle/>
+                    <a:p>
+                      <a:r>
+                        <a:rPr sz="1000" b="1">
+                          <a:solidFill>
+                            <a:srgbClr val="F8F8FA"/>
+                          </a:solidFill>
+                          <a:latin typeface="Courier New"/>
+                        </a:rPr>
+                        <a:t>4</a:t>
+                      </a:r>
+                    </a:p>
+                  </a:txBody>
+                  <a:tcPr>
+                    <a:solidFill>
+                      <a:srgbClr val="1F2B56"/>
+                    </a:solidFill>
+                  </a:tcPr>
+                </a:tc>
+                <a:tc>
+                  <a:txBody>
+                    <a:bodyPr wrap="square"/>
+                    <a:lstStyle/>
+                    <a:p>
+                      <a:r>
+                        <a:rPr sz="1000" b="1">
+                          <a:solidFill>
+                            <a:srgbClr val="F8F8FA"/>
+                          </a:solidFill>
+                          <a:latin typeface="Courier New"/>
+                        </a:rPr>
+                        <a:t>5</a:t>
+                      </a:r>
+                    </a:p>
+                  </a:txBody>
+                  <a:tcPr>
+                    <a:solidFill>
+                      <a:srgbClr val="1F2B56"/>
+                    </a:solidFill>
+                  </a:tcPr>
+                </a:tc>
+                <a:tc>
+                  <a:txBody>
+                    <a:bodyPr wrap="square"/>
+                    <a:lstStyle/>
+                    <a:p>
+                      <a:r>
+                        <a:rPr sz="1000" b="1">
+                          <a:solidFill>
+                            <a:srgbClr val="F8F8FA"/>
+                          </a:solidFill>
+                          <a:latin typeface="Courier New"/>
+                        </a:rPr>
+                        <a:t>Notiz</a:t>
+                      </a:r>
+                    </a:p>
+                  </a:txBody>
+                  <a:tcPr>
+                    <a:solidFill>
+                      <a:srgbClr val="1F2B56"/>
+                    </a:solidFill>
+                  </a:tcPr>
+                </a:tc>
+              </a:tr>
+              <a:tr h="380999">
+                <a:tc>
+                  <a:txBody>
+                    <a:bodyPr wrap="square"/>
+                    <a:lstStyle/>
+                    <a:p>
+                      <a:r>
+                        <a:rPr sz="1000" b="0">
+                          <a:solidFill>
+                            <a:srgbClr val="191D2E"/>
+                          </a:solidFill>
+                          <a:latin typeface="Courier New"/>
+                        </a:rPr>
+                        <a:t>Ich kann Bestandshalter, Bauträger und Projektentwickler sofort unterscheiden und dem richtigen Risikorahmen zuordnen.</a:t>
+                      </a:r>
+                    </a:p>
+                  </a:txBody>
+                  <a:tcPr>
+                    <a:solidFill>
+                      <a:srgbClr val="F8F8FA"/>
+                    </a:solidFill>
+                  </a:tcPr>
+                </a:tc>
+                <a:tc>
+                  <a:txBody>
+                    <a:bodyPr wrap="square"/>
+                    <a:lstStyle/>
+                    <a:p>
+                      <a:r>
+                        <a:rPr sz="1000" b="0">
+                          <a:solidFill>
+                            <a:srgbClr val="191D2E"/>
+                          </a:solidFill>
+                          <a:latin typeface="Courier New"/>
+                        </a:rPr>
+                        <a:t/>
+                      </a:r>
+                    </a:p>
+                  </a:txBody>
+                  <a:tcPr>
+                    <a:solidFill>
+                      <a:srgbClr val="F8F8FA"/>
+                    </a:solidFill>
+                  </a:tcPr>
+                </a:tc>
+                <a:tc>
+                  <a:txBody>
+                    <a:bodyPr wrap="square"/>
+                    <a:lstStyle/>
+                    <a:p>
+                      <a:r>
+                        <a:rPr sz="1000" b="0">
+                          <a:solidFill>
+                            <a:srgbClr val="191D2E"/>
+                          </a:solidFill>
+                          <a:latin typeface="Courier New"/>
+                        </a:rPr>
+                        <a:t/>
+                      </a:r>
+                    </a:p>
+                  </a:txBody>
+                  <a:tcPr>
+                    <a:solidFill>
+                      <a:srgbClr val="F8F8FA"/>
+                    </a:solidFill>
+                  </a:tcPr>
+                </a:tc>
+                <a:tc>
+                  <a:txBody>
+                    <a:bodyPr wrap="square"/>
+                    <a:lstStyle/>
+                    <a:p>
+                      <a:r>
+                        <a:rPr sz="1000" b="0">
+                          <a:solidFill>
+                            <a:srgbClr val="191D2E"/>
+                          </a:solidFill>
+                          <a:latin typeface="Courier New"/>
+                        </a:rPr>
+                        <a:t/>
+                      </a:r>
+                    </a:p>
+                  </a:txBody>
+                  <a:tcPr>
+                    <a:solidFill>
+                      <a:srgbClr val="F8F8FA"/>
+                    </a:solidFill>
+                  </a:tcPr>
+                </a:tc>
+                <a:tc>
+                  <a:txBody>
+                    <a:bodyPr wrap="square"/>
+                    <a:lstStyle/>
+                    <a:p>
+                      <a:r>
+                        <a:rPr sz="1000" b="0">
+                          <a:solidFill>
+                            <a:srgbClr val="191D2E"/>
+                          </a:solidFill>
+                          <a:latin typeface="Courier New"/>
+                        </a:rPr>
+                        <a:t/>
+                      </a:r>
+                    </a:p>
+                  </a:txBody>
+                  <a:tcPr>
+                    <a:solidFill>
+                      <a:srgbClr val="F8F8FA"/>
+                    </a:solidFill>
+                  </a:tcPr>
+                </a:tc>
+                <a:tc>
+                  <a:txBody>
+                    <a:bodyPr wrap="square"/>
+                    <a:lstStyle/>
+                    <a:p>
+                      <a:r>
+                        <a:rPr sz="1000" b="0">
+                          <a:solidFill>
+                            <a:srgbClr val="191D2E"/>
+                          </a:solidFill>
+                          <a:latin typeface="Courier New"/>
+                        </a:rPr>
+                        <a:t/>
+                      </a:r>
+                    </a:p>
+                  </a:txBody>
+                  <a:tcPr>
+                    <a:solidFill>
+                      <a:srgbClr val="F8F8FA"/>
+                    </a:solidFill>
+                  </a:tcPr>
+                </a:tc>
+                <a:tc>
+                  <a:txBody>
+                    <a:bodyPr wrap="square"/>
+                    <a:lstStyle/>
+                    <a:p>
+                      <a:r>
+                        <a:rPr sz="1000" b="0">
+                          <a:solidFill>
+                            <a:srgbClr val="191D2E"/>
+                          </a:solidFill>
+                          <a:latin typeface="Courier New"/>
+                        </a:rPr>
+                        <a:t/>
+                      </a:r>
+                    </a:p>
+                  </a:txBody>
+                  <a:tcPr>
+                    <a:solidFill>
+                      <a:srgbClr val="F8F8FA"/>
+                    </a:solidFill>
+                  </a:tcPr>
+                </a:tc>
+              </a:tr>
+              <a:tr h="380999">
+                <a:tc>
+                  <a:txBody>
+                    <a:bodyPr wrap="square"/>
+                    <a:lstStyle/>
+                    <a:p>
+                      <a:r>
+                        <a:rPr sz="1000" b="0">
+                          <a:solidFill>
+                            <a:srgbClr val="191D2E"/>
+                          </a:solidFill>
+                          <a:latin typeface="Courier New"/>
+                        </a:rPr>
+                        <a:t>Ich verstehe, warum der Beleihungswert systematisch unter dem Marktwert liegt, und kann das einem Kunden erklären.</a:t>
+                      </a:r>
+                    </a:p>
+                  </a:txBody>
+                  <a:tcPr>
+                    <a:solidFill>
+                      <a:srgbClr val="F0F0F5"/>
+                    </a:solidFill>
+                  </a:tcPr>
+                </a:tc>
+                <a:tc>
+                  <a:txBody>
+                    <a:bodyPr wrap="square"/>
+                    <a:lstStyle/>
+                    <a:p>
+                      <a:r>
+                        <a:rPr sz="1000" b="0">
+                          <a:solidFill>
+                            <a:srgbClr val="191D2E"/>
+                          </a:solidFill>
+                          <a:latin typeface="Courier New"/>
+                        </a:rPr>
+                        <a:t/>
+                      </a:r>
+                    </a:p>
+                  </a:txBody>
+                  <a:tcPr>
+                    <a:solidFill>
+                      <a:srgbClr val="F0F0F5"/>
+                    </a:solidFill>
+                  </a:tcPr>
+                </a:tc>
+                <a:tc>
+                  <a:txBody>
+                    <a:bodyPr wrap="square"/>
+                    <a:lstStyle/>
+                    <a:p>
+                      <a:r>
+                        <a:rPr sz="1000" b="0">
+                          <a:solidFill>
+                            <a:srgbClr val="191D2E"/>
+                          </a:solidFill>
+                          <a:latin typeface="Courier New"/>
+                        </a:rPr>
+                        <a:t/>
+                      </a:r>
+                    </a:p>
+                  </a:txBody>
+                  <a:tcPr>
+                    <a:solidFill>
+                      <a:srgbClr val="F0F0F5"/>
+                    </a:solidFill>
+                  </a:tcPr>
+                </a:tc>
+                <a:tc>
+                  <a:txBody>
+                    <a:bodyPr wrap="square"/>
+                    <a:lstStyle/>
+                    <a:p>
+                      <a:r>
+                        <a:rPr sz="1000" b="0">
+                          <a:solidFill>
+                            <a:srgbClr val="191D2E"/>
+                          </a:solidFill>
+                          <a:latin typeface="Courier New"/>
+                        </a:rPr>
+                        <a:t/>
+                      </a:r>
+                    </a:p>
+                  </a:txBody>
+                  <a:tcPr>
+                    <a:solidFill>
+                      <a:srgbClr val="F0F0F5"/>
+                    </a:solidFill>
+                  </a:tcPr>
+                </a:tc>
+                <a:tc>
+                  <a:txBody>
+                    <a:bodyPr wrap="square"/>
+                    <a:lstStyle/>
+                    <a:p>
+                      <a:r>
+                        <a:rPr sz="1000" b="0">
+                          <a:solidFill>
+                            <a:srgbClr val="191D2E"/>
+                          </a:solidFill>
+                          <a:latin typeface="Courier New"/>
+                        </a:rPr>
+                        <a:t/>
+                      </a:r>
+                    </a:p>
+                  </a:txBody>
+                  <a:tcPr>
+                    <a:solidFill>
+                      <a:srgbClr val="F0F0F5"/>
+                    </a:solidFill>
+                  </a:tcPr>
+                </a:tc>
+                <a:tc>
+                  <a:txBody>
+                    <a:bodyPr wrap="square"/>
+                    <a:lstStyle/>
+                    <a:p>
+                      <a:r>
+                        <a:rPr sz="1000" b="0">
+                          <a:solidFill>
+                            <a:srgbClr val="191D2E"/>
+                          </a:solidFill>
+                          <a:latin typeface="Courier New"/>
+                        </a:rPr>
+                        <a:t/>
+                      </a:r>
+                    </a:p>
+                  </a:txBody>
+                  <a:tcPr>
+                    <a:solidFill>
+                      <a:srgbClr val="F0F0F5"/>
+                    </a:solidFill>
+                  </a:tcPr>
+                </a:tc>
+                <a:tc>
+                  <a:txBody>
+                    <a:bodyPr wrap="square"/>
+                    <a:lstStyle/>
+                    <a:p>
+                      <a:r>
+                        <a:rPr sz="1000" b="0">
+                          <a:solidFill>
+                            <a:srgbClr val="191D2E"/>
+                          </a:solidFill>
+                          <a:latin typeface="Courier New"/>
+                        </a:rPr>
+                        <a:t/>
+                      </a:r>
+                    </a:p>
+                  </a:txBody>
+                  <a:tcPr>
+                    <a:solidFill>
+                      <a:srgbClr val="F0F0F5"/>
+                    </a:solidFill>
+                  </a:tcPr>
+                </a:tc>
+              </a:tr>
+              <a:tr h="380999">
+                <a:tc>
+                  <a:txBody>
+                    <a:bodyPr wrap="square"/>
+                    <a:lstStyle/>
+                    <a:p>
+                      <a:r>
+                        <a:rPr sz="1000" b="0">
+                          <a:solidFill>
+                            <a:srgbClr val="191D2E"/>
+                          </a:solidFill>
+                          <a:latin typeface="Courier New"/>
+                        </a:rPr>
+                        <a:t>Ich kann LTV und DSCR aus gegebenen Daten berechnen und das Ergebnis kreditpraktisch einordnen.</a:t>
+                      </a:r>
+                    </a:p>
+                  </a:txBody>
+                  <a:tcPr>
+                    <a:solidFill>
+                      <a:srgbClr val="F8F8FA"/>
+                    </a:solidFill>
+                  </a:tcPr>
+                </a:tc>
+                <a:tc>
+                  <a:txBody>
+                    <a:bodyPr wrap="square"/>
+                    <a:lstStyle/>
+                    <a:p>
+                      <a:r>
+                        <a:rPr sz="1000" b="0">
+                          <a:solidFill>
+                            <a:srgbClr val="191D2E"/>
+                          </a:solidFill>
+                          <a:latin typeface="Courier New"/>
+                        </a:rPr>
+                        <a:t/>
+                      </a:r>
+                    </a:p>
+                  </a:txBody>
+                  <a:tcPr>
+                    <a:solidFill>
+                      <a:srgbClr val="F8F8FA"/>
+                    </a:solidFill>
+                  </a:tcPr>
+                </a:tc>
+                <a:tc>
+                  <a:txBody>
+                    <a:bodyPr wrap="square"/>
+                    <a:lstStyle/>
+                    <a:p>
+                      <a:r>
+                        <a:rPr sz="1000" b="0">
+                          <a:solidFill>
+                            <a:srgbClr val="191D2E"/>
+                          </a:solidFill>
+                          <a:latin typeface="Courier New"/>
+                        </a:rPr>
+                        <a:t/>
+                      </a:r>
+                    </a:p>
+                  </a:txBody>
+                  <a:tcPr>
+                    <a:solidFill>
+                      <a:srgbClr val="F8F8FA"/>
+                    </a:solidFill>
+                  </a:tcPr>
+                </a:tc>
+                <a:tc>
+                  <a:txBody>
+                    <a:bodyPr wrap="square"/>
+                    <a:lstStyle/>
+                    <a:p>
+                      <a:r>
+                        <a:rPr sz="1000" b="0">
+                          <a:solidFill>
+                            <a:srgbClr val="191D2E"/>
+                          </a:solidFill>
+                          <a:latin typeface="Courier New"/>
+                        </a:rPr>
+                        <a:t/>
+                      </a:r>
+                    </a:p>
+                  </a:txBody>
+                  <a:tcPr>
+                    <a:solidFill>
+                      <a:srgbClr val="F8F8FA"/>
+                    </a:solidFill>
+                  </a:tcPr>
+                </a:tc>
+                <a:tc>
+                  <a:txBody>
+                    <a:bodyPr wrap="square"/>
+                    <a:lstStyle/>
+                    <a:p>
+                      <a:r>
+                        <a:rPr sz="1000" b="0">
+                          <a:solidFill>
+                            <a:srgbClr val="191D2E"/>
+                          </a:solidFill>
+                          <a:latin typeface="Courier New"/>
+                        </a:rPr>
+                        <a:t/>
+                      </a:r>
+                    </a:p>
+                  </a:txBody>
+                  <a:tcPr>
+                    <a:solidFill>
+                      <a:srgbClr val="F8F8FA"/>
+                    </a:solidFill>
+                  </a:tcPr>
+                </a:tc>
+                <a:tc>
+                  <a:txBody>
+                    <a:bodyPr wrap="square"/>
+                    <a:lstStyle/>
+                    <a:p>
+                      <a:r>
+                        <a:rPr sz="1000" b="0">
+                          <a:solidFill>
+                            <a:srgbClr val="191D2E"/>
+                          </a:solidFill>
+                          <a:latin typeface="Courier New"/>
+                        </a:rPr>
+                        <a:t/>
+                      </a:r>
+                    </a:p>
+                  </a:txBody>
+                  <a:tcPr>
+                    <a:solidFill>
+                      <a:srgbClr val="F8F8FA"/>
+                    </a:solidFill>
+                  </a:tcPr>
+                </a:tc>
+                <a:tc>
+                  <a:txBody>
+                    <a:bodyPr wrap="square"/>
+                    <a:lstStyle/>
+                    <a:p>
+                      <a:r>
+                        <a:rPr sz="1000" b="0">
+                          <a:solidFill>
+                            <a:srgbClr val="191D2E"/>
+                          </a:solidFill>
+                          <a:latin typeface="Courier New"/>
+                        </a:rPr>
+                        <a:t/>
+                      </a:r>
+                    </a:p>
+                  </a:txBody>
+                  <a:tcPr>
+                    <a:solidFill>
+                      <a:srgbClr val="F8F8FA"/>
+                    </a:solidFill>
+                  </a:tcPr>
+                </a:tc>
+              </a:tr>
+              <a:tr h="380999">
+                <a:tc>
+                  <a:txBody>
+                    <a:bodyPr wrap="square"/>
+                    <a:lstStyle/>
+                    <a:p>
+                      <a:r>
+                        <a:rPr sz="1000" b="0">
+                          <a:solidFill>
+                            <a:srgbClr val="191D2E"/>
+                          </a:solidFill>
+                          <a:latin typeface="Courier New"/>
+                        </a:rPr>
+                        <a:t>Ich kenne die vier Hauptrisikofelder der Bauträgerfinanzierung und kann sie für ein konkretes Projekt priorisieren.</a:t>
+                      </a:r>
+                    </a:p>
+                  </a:txBody>
+                  <a:tcPr>
+                    <a:solidFill>
+                      <a:srgbClr val="F0F0F5"/>
+                    </a:solidFill>
+                  </a:tcPr>
+                </a:tc>
+                <a:tc>
+                  <a:txBody>
+                    <a:bodyPr wrap="square"/>
+                    <a:lstStyle/>
+                    <a:p>
+                      <a:r>
+                        <a:rPr sz="1000" b="0">
+                          <a:solidFill>
+                            <a:srgbClr val="191D2E"/>
+                          </a:solidFill>
+                          <a:latin typeface="Courier New"/>
+                        </a:rPr>
+                        <a:t/>
+                      </a:r>
+                    </a:p>
+                  </a:txBody>
+                  <a:tcPr>
+                    <a:solidFill>
+                      <a:srgbClr val="F0F0F5"/>
+                    </a:solidFill>
+                  </a:tcPr>
+                </a:tc>
+                <a:tc>
+                  <a:txBody>
+                    <a:bodyPr wrap="square"/>
+                    <a:lstStyle/>
+                    <a:p>
+                      <a:r>
+                        <a:rPr sz="1000" b="0">
+                          <a:solidFill>
+                            <a:srgbClr val="191D2E"/>
+                          </a:solidFill>
+                          <a:latin typeface="Courier New"/>
+                        </a:rPr>
+                        <a:t/>
+                      </a:r>
+                    </a:p>
+                  </a:txBody>
+                  <a:tcPr>
+                    <a:solidFill>
+                      <a:srgbClr val="F0F0F5"/>
+                    </a:solidFill>
+                  </a:tcPr>
+                </a:tc>
+                <a:tc>
+                  <a:txBody>
+                    <a:bodyPr wrap="square"/>
+                    <a:lstStyle/>
+                    <a:p>
+                      <a:r>
+                        <a:rPr sz="1000" b="0">
+                          <a:solidFill>
+                            <a:srgbClr val="191D2E"/>
+                          </a:solidFill>
+                          <a:latin typeface="Courier New"/>
+                        </a:rPr>
+                        <a:t/>
+                      </a:r>
+                    </a:p>
+                  </a:txBody>
+                  <a:tcPr>
+                    <a:solidFill>
+                      <a:srgbClr val="F0F0F5"/>
+                    </a:solidFill>
+                  </a:tcPr>
+                </a:tc>
+                <a:tc>
+                  <a:txBody>
+                    <a:bodyPr wrap="square"/>
+                    <a:lstStyle/>
+                    <a:p>
+                      <a:r>
+                        <a:rPr sz="1000" b="0">
+                          <a:solidFill>
+                            <a:srgbClr val="191D2E"/>
+                          </a:solidFill>
+                          <a:latin typeface="Courier New"/>
+                        </a:rPr>
+                        <a:t/>
+                      </a:r>
+                    </a:p>
+                  </a:txBody>
+                  <a:tcPr>
+                    <a:solidFill>
+                      <a:srgbClr val="F0F0F5"/>
+                    </a:solidFill>
+                  </a:tcPr>
+                </a:tc>
+                <a:tc>
+                  <a:txBody>
+                    <a:bodyPr wrap="square"/>
+                    <a:lstStyle/>
+                    <a:p>
+                      <a:r>
+                        <a:rPr sz="1000" b="0">
+                          <a:solidFill>
+                            <a:srgbClr val="191D2E"/>
+                          </a:solidFill>
+                          <a:latin typeface="Courier New"/>
+                        </a:rPr>
+                        <a:t/>
+                      </a:r>
+                    </a:p>
+                  </a:txBody>
+                  <a:tcPr>
+                    <a:solidFill>
+                      <a:srgbClr val="F0F0F5"/>
+                    </a:solidFill>
+                  </a:tcPr>
+                </a:tc>
+                <a:tc>
+                  <a:txBody>
+                    <a:bodyPr wrap="square"/>
+                    <a:lstStyle/>
+                    <a:p>
+                      <a:r>
+                        <a:rPr sz="1000" b="0">
+                          <a:solidFill>
+                            <a:srgbClr val="191D2E"/>
+                          </a:solidFill>
+                          <a:latin typeface="Courier New"/>
+                        </a:rPr>
+                        <a:t/>
+                      </a:r>
+                    </a:p>
+                  </a:txBody>
+                  <a:tcPr>
+                    <a:solidFill>
+                      <a:srgbClr val="F0F0F5"/>
+                    </a:solidFill>
+                  </a:tcPr>
+                </a:tc>
+              </a:tr>
+              <a:tr h="380999">
+                <a:tc>
+                  <a:txBody>
+                    <a:bodyPr wrap="square"/>
+                    <a:lstStyle/>
+                    <a:p>
+                      <a:r>
+                        <a:rPr sz="1000" b="0">
+                          <a:solidFill>
+                            <a:srgbClr val="191D2E"/>
+                          </a:solidFill>
+                          <a:latin typeface="Courier New"/>
+                        </a:rPr>
+                        <a:t>Ich habe die BelWertV als regulatorischen Rahmen verstanden und weiß, wann Ertragswert- und wann Sachwertverfahren anzuwenden ist.</a:t>
+                      </a:r>
+                    </a:p>
+                  </a:txBody>
+                  <a:tcPr>
+                    <a:solidFill>
+                      <a:srgbClr val="F8F8FA"/>
+                    </a:solidFill>
+                  </a:tcPr>
+                </a:tc>
+                <a:tc>
+                  <a:txBody>
+                    <a:bodyPr wrap="square"/>
+                    <a:lstStyle/>
+                    <a:p>
+                      <a:r>
+                        <a:rPr sz="1000" b="0">
+                          <a:solidFill>
+                            <a:srgbClr val="191D2E"/>
+                          </a:solidFill>
+                          <a:latin typeface="Courier New"/>
+                        </a:rPr>
+                        <a:t/>
+                      </a:r>
+                    </a:p>
+                  </a:txBody>
+                  <a:tcPr>
+                    <a:solidFill>
+                      <a:srgbClr val="F8F8FA"/>
+                    </a:solidFill>
+                  </a:tcPr>
+                </a:tc>
+                <a:tc>
+                  <a:txBody>
+                    <a:bodyPr wrap="square"/>
+                    <a:lstStyle/>
+                    <a:p>
+                      <a:r>
+                        <a:rPr sz="1000" b="0">
+                          <a:solidFill>
+                            <a:srgbClr val="191D2E"/>
+                          </a:solidFill>
+                          <a:latin typeface="Courier New"/>
+                        </a:rPr>
+                        <a:t/>
+                      </a:r>
+                    </a:p>
+                  </a:txBody>
+                  <a:tcPr>
+                    <a:solidFill>
+                      <a:srgbClr val="F8F8FA"/>
+                    </a:solidFill>
+                  </a:tcPr>
+                </a:tc>
+                <a:tc>
+                  <a:txBody>
+                    <a:bodyPr wrap="square"/>
+                    <a:lstStyle/>
+                    <a:p>
+                      <a:r>
+                        <a:rPr sz="1000" b="0">
+                          <a:solidFill>
+                            <a:srgbClr val="191D2E"/>
+                          </a:solidFill>
+                          <a:latin typeface="Courier New"/>
+                        </a:rPr>
+                        <a:t/>
+                      </a:r>
+                    </a:p>
+                  </a:txBody>
+                  <a:tcPr>
+                    <a:solidFill>
+                      <a:srgbClr val="F8F8FA"/>
+                    </a:solidFill>
+                  </a:tcPr>
+                </a:tc>
+                <a:tc>
+                  <a:txBody>
+                    <a:bodyPr wrap="square"/>
+                    <a:lstStyle/>
+                    <a:p>
+                      <a:r>
+                        <a:rPr sz="1000" b="0">
+                          <a:solidFill>
+                            <a:srgbClr val="191D2E"/>
+                          </a:solidFill>
+                          <a:latin typeface="Courier New"/>
+                        </a:rPr>
+                        <a:t/>
+                      </a:r>
+                    </a:p>
+                  </a:txBody>
+                  <a:tcPr>
+                    <a:solidFill>
+                      <a:srgbClr val="F8F8FA"/>
+                    </a:solidFill>
+                  </a:tcPr>
+                </a:tc>
+                <a:tc>
+                  <a:txBody>
+                    <a:bodyPr wrap="square"/>
+                    <a:lstStyle/>
+                    <a:p>
+                      <a:r>
+                        <a:rPr sz="1000" b="0">
+                          <a:solidFill>
+                            <a:srgbClr val="191D2E"/>
+                          </a:solidFill>
+                          <a:latin typeface="Courier New"/>
+                        </a:rPr>
+                        <a:t/>
+                      </a:r>
+                    </a:p>
+                  </a:txBody>
+                  <a:tcPr>
+                    <a:solidFill>
+                      <a:srgbClr val="F8F8FA"/>
+                    </a:solidFill>
+                  </a:tcPr>
+                </a:tc>
+                <a:tc>
+                  <a:txBody>
+                    <a:bodyPr wrap="square"/>
+                    <a:lstStyle/>
+                    <a:p>
+                      <a:r>
+                        <a:rPr sz="1000" b="0">
+                          <a:solidFill>
+                            <a:srgbClr val="191D2E"/>
+                          </a:solidFill>
+                          <a:latin typeface="Courier New"/>
+                        </a:rPr>
+                        <a:t/>
+                      </a:r>
+                    </a:p>
+                  </a:txBody>
+                  <a:tcPr>
+                    <a:solidFill>
+                      <a:srgbClr val="F8F8FA"/>
+                    </a:solidFill>
+                  </a:tcPr>
+                </a:tc>
+              </a:tr>
+              <a:tr h="380999">
+                <a:tc>
+                  <a:txBody>
+                    <a:bodyPr wrap="square"/>
+                    <a:lstStyle/>
+                    <a:p>
+                      <a:r>
+                        <a:rPr sz="1000" b="0">
+                          <a:solidFill>
+                            <a:srgbClr val="191D2E"/>
+                          </a:solidFill>
+                          <a:latin typeface="Courier New"/>
+                        </a:rPr>
+                        <a:t>Ich weiß, wann MünchenerHyp oder DZ BANK als Verbundpartner einzubinden sind.</a:t>
+                      </a:r>
+                    </a:p>
+                  </a:txBody>
+                  <a:tcPr>
+                    <a:solidFill>
+                      <a:srgbClr val="F0F0F5"/>
+                    </a:solidFill>
+                  </a:tcPr>
+                </a:tc>
+                <a:tc>
+                  <a:txBody>
+                    <a:bodyPr wrap="square"/>
+                    <a:lstStyle/>
+                    <a:p>
+                      <a:r>
+                        <a:rPr sz="1000" b="0">
+                          <a:solidFill>
+                            <a:srgbClr val="191D2E"/>
+                          </a:solidFill>
+                          <a:latin typeface="Courier New"/>
+                        </a:rPr>
+                        <a:t/>
+                      </a:r>
+                    </a:p>
+                  </a:txBody>
+                  <a:tcPr>
+                    <a:solidFill>
+                      <a:srgbClr val="F0F0F5"/>
+                    </a:solidFill>
+                  </a:tcPr>
+                </a:tc>
+                <a:tc>
+                  <a:txBody>
+                    <a:bodyPr wrap="square"/>
+                    <a:lstStyle/>
+                    <a:p>
+                      <a:r>
+                        <a:rPr sz="1000" b="0">
+                          <a:solidFill>
+                            <a:srgbClr val="191D2E"/>
+                          </a:solidFill>
+                          <a:latin typeface="Courier New"/>
+                        </a:rPr>
+                        <a:t/>
+                      </a:r>
+                    </a:p>
+                  </a:txBody>
+                  <a:tcPr>
+                    <a:solidFill>
+                      <a:srgbClr val="F0F0F5"/>
+                    </a:solidFill>
+                  </a:tcPr>
+                </a:tc>
+                <a:tc>
+                  <a:txBody>
+                    <a:bodyPr wrap="square"/>
+                    <a:lstStyle/>
+                    <a:p>
+                      <a:r>
+                        <a:rPr sz="1000" b="0">
+                          <a:solidFill>
+                            <a:srgbClr val="191D2E"/>
+                          </a:solidFill>
+                          <a:latin typeface="Courier New"/>
+                        </a:rPr>
+                        <a:t/>
+                      </a:r>
+                    </a:p>
+                  </a:txBody>
+                  <a:tcPr>
+                    <a:solidFill>
+                      <a:srgbClr val="F0F0F5"/>
+                    </a:solidFill>
+                  </a:tcPr>
+                </a:tc>
+                <a:tc>
+                  <a:txBody>
+                    <a:bodyPr wrap="square"/>
+                    <a:lstStyle/>
+                    <a:p>
+                      <a:r>
+                        <a:rPr sz="1000" b="0">
+                          <a:solidFill>
+                            <a:srgbClr val="191D2E"/>
+                          </a:solidFill>
+                          <a:latin typeface="Courier New"/>
+                        </a:rPr>
+                        <a:t/>
+                      </a:r>
+                    </a:p>
+                  </a:txBody>
+                  <a:tcPr>
+                    <a:solidFill>
+                      <a:srgbClr val="F0F0F5"/>
+                    </a:solidFill>
+                  </a:tcPr>
+                </a:tc>
+                <a:tc>
+                  <a:txBody>
+                    <a:bodyPr wrap="square"/>
+                    <a:lstStyle/>
+                    <a:p>
+                      <a:r>
+                        <a:rPr sz="1000" b="0">
+                          <a:solidFill>
+                            <a:srgbClr val="191D2E"/>
+                          </a:solidFill>
+                          <a:latin typeface="Courier New"/>
+                        </a:rPr>
+                        <a:t/>
+                      </a:r>
+                    </a:p>
+                  </a:txBody>
+                  <a:tcPr>
+                    <a:solidFill>
+                      <a:srgbClr val="F0F0F5"/>
+                    </a:solidFill>
+                  </a:tcPr>
+                </a:tc>
+                <a:tc>
+                  <a:txBody>
+                    <a:bodyPr wrap="square"/>
+                    <a:lstStyle/>
+                    <a:p>
+                      <a:r>
+                        <a:rPr sz="1000" b="0">
+                          <a:solidFill>
+                            <a:srgbClr val="191D2E"/>
+                          </a:solidFill>
+                          <a:latin typeface="Courier New"/>
+                        </a:rPr>
+                        <a:t/>
+                      </a:r>
+                    </a:p>
+                  </a:txBody>
+                  <a:tcPr>
+                    <a:solidFill>
+                      <a:srgbClr val="F0F0F5"/>
+                    </a:solidFill>
+                  </a:tcPr>
+                </a:tc>
+              </a:tr>
+              <a:tr h="380999">
+                <a:tc>
+                  <a:txBody>
+                    <a:bodyPr wrap="square"/>
+                    <a:lstStyle/>
+                    <a:p>
+                      <a:r>
+                        <a:rPr sz="1000" b="0">
+                          <a:solidFill>
+                            <a:srgbClr val="191D2E"/>
+                          </a:solidFill>
+                          <a:latin typeface="Courier New"/>
+                        </a:rPr>
+                        <a:t>Ich habe bei einem Bestandskunden mindestens zwei Immobilienkennzahlen berechnet und mit Richtwerten verglichen.</a:t>
+                      </a:r>
+                    </a:p>
+                  </a:txBody>
+                  <a:tcPr>
+                    <a:solidFill>
+                      <a:srgbClr val="F8F8FA"/>
+                    </a:solidFill>
+                  </a:tcPr>
+                </a:tc>
+                <a:tc>
+                  <a:txBody>
+                    <a:bodyPr wrap="square"/>
+                    <a:lstStyle/>
+                    <a:p>
+                      <a:r>
+                        <a:rPr sz="1000" b="0">
+                          <a:solidFill>
+                            <a:srgbClr val="191D2E"/>
+                          </a:solidFill>
+                          <a:latin typeface="Courier New"/>
+                        </a:rPr>
+                        <a:t/>
+                      </a:r>
+                    </a:p>
+                  </a:txBody>
+                  <a:tcPr>
+                    <a:solidFill>
+                      <a:srgbClr val="F8F8FA"/>
+                    </a:solidFill>
+                  </a:tcPr>
+                </a:tc>
+                <a:tc>
+                  <a:txBody>
+                    <a:bodyPr wrap="square"/>
+                    <a:lstStyle/>
+                    <a:p>
+                      <a:r>
+                        <a:rPr sz="1000" b="0">
+                          <a:solidFill>
+                            <a:srgbClr val="191D2E"/>
+                          </a:solidFill>
+                          <a:latin typeface="Courier New"/>
+                        </a:rPr>
+                        <a:t/>
+                      </a:r>
+                    </a:p>
+                  </a:txBody>
+                  <a:tcPr>
+                    <a:solidFill>
+                      <a:srgbClr val="F8F8FA"/>
+                    </a:solidFill>
+                  </a:tcPr>
+                </a:tc>
+                <a:tc>
+                  <a:txBody>
+                    <a:bodyPr wrap="square"/>
+                    <a:lstStyle/>
+                    <a:p>
+                      <a:r>
+                        <a:rPr sz="1000" b="0">
+                          <a:solidFill>
+                            <a:srgbClr val="191D2E"/>
+                          </a:solidFill>
+                          <a:latin typeface="Courier New"/>
+                        </a:rPr>
+                        <a:t/>
+                      </a:r>
+                    </a:p>
+                  </a:txBody>
+                  <a:tcPr>
+                    <a:solidFill>
+                      <a:srgbClr val="F8F8FA"/>
+                    </a:solidFill>
+                  </a:tcPr>
+                </a:tc>
+                <a:tc>
+                  <a:txBody>
+                    <a:bodyPr wrap="square"/>
+                    <a:lstStyle/>
+                    <a:p>
+                      <a:r>
+                        <a:rPr sz="1000" b="0">
+                          <a:solidFill>
+                            <a:srgbClr val="191D2E"/>
+                          </a:solidFill>
+                          <a:latin typeface="Courier New"/>
+                        </a:rPr>
+                        <a:t/>
+                      </a:r>
+                    </a:p>
+                  </a:txBody>
+                  <a:tcPr>
+                    <a:solidFill>
+                      <a:srgbClr val="F8F8FA"/>
+                    </a:solidFill>
+                  </a:tcPr>
+                </a:tc>
+                <a:tc>
+                  <a:txBody>
+                    <a:bodyPr wrap="square"/>
+                    <a:lstStyle/>
+                    <a:p>
+                      <a:r>
+                        <a:rPr sz="1000" b="0">
+                          <a:solidFill>
+                            <a:srgbClr val="191D2E"/>
+                          </a:solidFill>
+                          <a:latin typeface="Courier New"/>
+                        </a:rPr>
+                        <a:t/>
+                      </a:r>
+                    </a:p>
+                  </a:txBody>
+                  <a:tcPr>
+                    <a:solidFill>
+                      <a:srgbClr val="F8F8FA"/>
+                    </a:solidFill>
+                  </a:tcPr>
+                </a:tc>
+                <a:tc>
+                  <a:txBody>
+                    <a:bodyPr wrap="square"/>
+                    <a:lstStyle/>
+                    <a:p>
+                      <a:r>
+                        <a:rPr sz="1000" b="0">
+                          <a:solidFill>
+                            <a:srgbClr val="191D2E"/>
+                          </a:solidFill>
+                          <a:latin typeface="Courier New"/>
+                        </a:rPr>
+                        <a:t/>
+                      </a:r>
+                    </a:p>
+                  </a:txBody>
+                  <a:tcPr>
+                    <a:solidFill>
+                      <a:srgbClr val="F8F8FA"/>
+                    </a:solidFill>
+                  </a:tcPr>
+                </a:tc>
+              </a:tr>
+              <a:tr h="380999">
+                <a:tc>
+                  <a:txBody>
+                    <a:bodyPr wrap="square"/>
+                    <a:lstStyle/>
+                    <a:p>
+                      <a:r>
+                        <a:rPr sz="1000" b="0">
+                          <a:solidFill>
+                            <a:srgbClr val="191D2E"/>
+                          </a:solidFill>
+                          <a:latin typeface="Courier New"/>
+                        </a:rPr>
+                        <a:t>Ich habe einen Risikoaspekt einer Immobilienfinanzierung in einem Kundengespräch aktiv angesprochen.</a:t>
+                      </a:r>
+                    </a:p>
+                  </a:txBody>
+                  <a:tcPr>
+                    <a:solidFill>
+                      <a:srgbClr val="F0F0F5"/>
+                    </a:solidFill>
+                  </a:tcPr>
+                </a:tc>
+                <a:tc>
+                  <a:txBody>
+                    <a:bodyPr wrap="square"/>
+                    <a:lstStyle/>
+                    <a:p>
+                      <a:r>
+                        <a:rPr sz="1000" b="0">
+                          <a:solidFill>
+                            <a:srgbClr val="191D2E"/>
+                          </a:solidFill>
+                          <a:latin typeface="Courier New"/>
+                        </a:rPr>
+                        <a:t/>
+                      </a:r>
+                    </a:p>
+                  </a:txBody>
+                  <a:tcPr>
+                    <a:solidFill>
+                      <a:srgbClr val="F0F0F5"/>
+                    </a:solidFill>
+                  </a:tcPr>
+                </a:tc>
+                <a:tc>
+                  <a:txBody>
+                    <a:bodyPr wrap="square"/>
+                    <a:lstStyle/>
+                    <a:p>
+                      <a:r>
+                        <a:rPr sz="1000" b="0">
+                          <a:solidFill>
+                            <a:srgbClr val="191D2E"/>
+                          </a:solidFill>
+                          <a:latin typeface="Courier New"/>
+                        </a:rPr>
+                        <a:t/>
+                      </a:r>
+                    </a:p>
+                  </a:txBody>
+                  <a:tcPr>
+                    <a:solidFill>
+                      <a:srgbClr val="F0F0F5"/>
+                    </a:solidFill>
+                  </a:tcPr>
+                </a:tc>
+                <a:tc>
+                  <a:txBody>
+                    <a:bodyPr wrap="square"/>
+                    <a:lstStyle/>
+                    <a:p>
+                      <a:r>
+                        <a:rPr sz="1000" b="0">
+                          <a:solidFill>
+                            <a:srgbClr val="191D2E"/>
+                          </a:solidFill>
+                          <a:latin typeface="Courier New"/>
+                        </a:rPr>
+                        <a:t/>
+                      </a:r>
+                    </a:p>
+                  </a:txBody>
+                  <a:tcPr>
+                    <a:solidFill>
+                      <a:srgbClr val="F0F0F5"/>
+                    </a:solidFill>
+                  </a:tcPr>
+                </a:tc>
+                <a:tc>
+                  <a:txBody>
+                    <a:bodyPr wrap="square"/>
+                    <a:lstStyle/>
+                    <a:p>
+                      <a:r>
+                        <a:rPr sz="1000" b="0">
+                          <a:solidFill>
+                            <a:srgbClr val="191D2E"/>
+                          </a:solidFill>
+                          <a:latin typeface="Courier New"/>
+                        </a:rPr>
+                        <a:t/>
+                      </a:r>
+                    </a:p>
+                  </a:txBody>
+                  <a:tcPr>
+                    <a:solidFill>
+                      <a:srgbClr val="F0F0F5"/>
+                    </a:solidFill>
+                  </a:tcPr>
+                </a:tc>
+                <a:tc>
+                  <a:txBody>
+                    <a:bodyPr wrap="square"/>
+                    <a:lstStyle/>
+                    <a:p>
+                      <a:r>
+                        <a:rPr sz="1000" b="0">
+                          <a:solidFill>
+                            <a:srgbClr val="191D2E"/>
+                          </a:solidFill>
+                          <a:latin typeface="Courier New"/>
+                        </a:rPr>
+                        <a:t/>
+                      </a:r>
+                    </a:p>
+                  </a:txBody>
+                  <a:tcPr>
+                    <a:solidFill>
+                      <a:srgbClr val="F0F0F5"/>
+                    </a:solidFill>
+                  </a:tcPr>
+                </a:tc>
+                <a:tc>
+                  <a:txBody>
+                    <a:bodyPr wrap="square"/>
+                    <a:lstStyle/>
+                    <a:p>
+                      <a:r>
+                        <a:rPr sz="1000" b="0">
+                          <a:solidFill>
+                            <a:srgbClr val="191D2E"/>
+                          </a:solidFill>
+                          <a:latin typeface="Courier New"/>
+                        </a:rPr>
+                        <a:t/>
+                      </a:r>
+                    </a:p>
+                  </a:txBody>
+                  <a:tcPr>
+                    <a:solidFill>
+                      <a:srgbClr val="F0F0F5"/>
+                    </a:solidFill>
+                  </a:tcPr>
+                </a:tc>
+              </a:tr>
+              <a:tr h="380999">
+                <a:tc>
+                  <a:txBody>
+                    <a:bodyPr wrap="square"/>
+                    <a:lstStyle/>
+                    <a:p>
+                      <a:r>
+                        <a:rPr sz="1000" b="0">
+                          <a:solidFill>
+                            <a:srgbClr val="191D2E"/>
+                          </a:solidFill>
+                          <a:latin typeface="Courier New"/>
+                        </a:rPr>
+                        <a:t>Ich fühle mich sicher darin, eine einfache Kreditempfehlung für einen Bestandshalter zu formulieren.</a:t>
+                      </a:r>
+                    </a:p>
+                  </a:txBody>
+                  <a:tcPr>
+                    <a:solidFill>
+                      <a:srgbClr val="F8F8FA"/>
+                    </a:solidFill>
+                  </a:tcPr>
+                </a:tc>
+                <a:tc>
+                  <a:txBody>
+                    <a:bodyPr wrap="square"/>
+                    <a:lstStyle/>
+                    <a:p>
+                      <a:r>
+                        <a:rPr sz="1000" b="0">
+                          <a:solidFill>
+                            <a:srgbClr val="191D2E"/>
+                          </a:solidFill>
+                          <a:latin typeface="Courier New"/>
+                        </a:rPr>
+                        <a:t/>
+                      </a:r>
+                    </a:p>
+                  </a:txBody>
+                  <a:tcPr>
+                    <a:solidFill>
+                      <a:srgbClr val="F8F8FA"/>
+                    </a:solidFill>
+                  </a:tcPr>
+                </a:tc>
+                <a:tc>
+                  <a:txBody>
+                    <a:bodyPr wrap="square"/>
+                    <a:lstStyle/>
+                    <a:p>
+                      <a:r>
+                        <a:rPr sz="1000" b="0">
+                          <a:solidFill>
+                            <a:srgbClr val="191D2E"/>
+                          </a:solidFill>
+                          <a:latin typeface="Courier New"/>
+                        </a:rPr>
+                        <a:t/>
+                      </a:r>
+                    </a:p>
+                  </a:txBody>
+                  <a:tcPr>
+                    <a:solidFill>
+                      <a:srgbClr val="F8F8FA"/>
+                    </a:solidFill>
+                  </a:tcPr>
+                </a:tc>
+                <a:tc>
+                  <a:txBody>
+                    <a:bodyPr wrap="square"/>
+                    <a:lstStyle/>
+                    <a:p>
+                      <a:r>
+                        <a:rPr sz="1000" b="0">
+                          <a:solidFill>
+                            <a:srgbClr val="191D2E"/>
+                          </a:solidFill>
+                          <a:latin typeface="Courier New"/>
+                        </a:rPr>
+                        <a:t/>
+                      </a:r>
+                    </a:p>
+                  </a:txBody>
+                  <a:tcPr>
+                    <a:solidFill>
+                      <a:srgbClr val="F8F8FA"/>
+                    </a:solidFill>
+                  </a:tcPr>
+                </a:tc>
+                <a:tc>
+                  <a:txBody>
+                    <a:bodyPr wrap="square"/>
+                    <a:lstStyle/>
+                    <a:p>
+                      <a:r>
+                        <a:rPr sz="1000" b="0">
+                          <a:solidFill>
+                            <a:srgbClr val="191D2E"/>
+                          </a:solidFill>
+                          <a:latin typeface="Courier New"/>
+                        </a:rPr>
+                        <a:t/>
+                      </a:r>
+                    </a:p>
+                  </a:txBody>
+                  <a:tcPr>
+                    <a:solidFill>
+                      <a:srgbClr val="F8F8FA"/>
+                    </a:solidFill>
+                  </a:tcPr>
+                </a:tc>
+                <a:tc>
+                  <a:txBody>
+                    <a:bodyPr wrap="square"/>
+                    <a:lstStyle/>
+                    <a:p>
+                      <a:r>
+                        <a:rPr sz="1000" b="0">
+                          <a:solidFill>
+                            <a:srgbClr val="191D2E"/>
+                          </a:solidFill>
+                          <a:latin typeface="Courier New"/>
+                        </a:rPr>
+                        <a:t/>
+                      </a:r>
+                    </a:p>
+                  </a:txBody>
+                  <a:tcPr>
+                    <a:solidFill>
+                      <a:srgbClr val="F8F8FA"/>
+                    </a:solidFill>
+                  </a:tcPr>
+                </a:tc>
+                <a:tc>
+                  <a:txBody>
+                    <a:bodyPr wrap="square"/>
+                    <a:lstStyle/>
+                    <a:p>
+                      <a:r>
+                        <a:rPr sz="1000" b="0">
+                          <a:solidFill>
+                            <a:srgbClr val="191D2E"/>
+                          </a:solidFill>
+                          <a:latin typeface="Courier New"/>
+                        </a:rPr>
+                        <a:t/>
+                      </a:r>
+                    </a:p>
+                  </a:txBody>
+                  <a:tcPr>
+                    <a:solidFill>
+                      <a:srgbClr val="F8F8FA"/>
+                    </a:solidFill>
+                  </a:tcPr>
+                </a:tc>
+              </a:tr>
+              <a:tr h="381009">
+                <a:tc>
+                  <a:txBody>
+                    <a:bodyPr wrap="square"/>
+                    <a:lstStyle/>
+                    <a:p>
+                      <a:r>
+                        <a:rPr sz="1000" b="0">
+                          <a:solidFill>
+                            <a:srgbClr val="191D2E"/>
+                          </a:solidFill>
+                          <a:latin typeface="Courier New"/>
+                        </a:rPr>
+                        <a:t>Ich habe meine Analyse in agree/VR-NetWorld dokumentiert.</a:t>
+                      </a:r>
+                    </a:p>
+                  </a:txBody>
+                  <a:tcPr>
+                    <a:solidFill>
+                      <a:srgbClr val="F0F0F5"/>
+                    </a:solidFill>
+                  </a:tcPr>
+                </a:tc>
+                <a:tc>
+                  <a:txBody>
+                    <a:bodyPr wrap="square"/>
+                    <a:lstStyle/>
+                    <a:p>
+                      <a:r>
+                        <a:rPr sz="1000" b="0">
+                          <a:solidFill>
+                            <a:srgbClr val="191D2E"/>
+                          </a:solidFill>
+                          <a:latin typeface="Courier New"/>
+                        </a:rPr>
+                        <a:t/>
+                      </a:r>
+                    </a:p>
+                  </a:txBody>
+                  <a:tcPr>
+                    <a:solidFill>
+                      <a:srgbClr val="F0F0F5"/>
+                    </a:solidFill>
+                  </a:tcPr>
+                </a:tc>
+                <a:tc>
+                  <a:txBody>
+                    <a:bodyPr wrap="square"/>
+                    <a:lstStyle/>
+                    <a:p>
+                      <a:r>
+                        <a:rPr sz="1000" b="0">
+                          <a:solidFill>
+                            <a:srgbClr val="191D2E"/>
+                          </a:solidFill>
+                          <a:latin typeface="Courier New"/>
+                        </a:rPr>
+                        <a:t/>
+                      </a:r>
+                    </a:p>
+                  </a:txBody>
+                  <a:tcPr>
+                    <a:solidFill>
+                      <a:srgbClr val="F0F0F5"/>
+                    </a:solidFill>
+                  </a:tcPr>
+                </a:tc>
+                <a:tc>
+                  <a:txBody>
+                    <a:bodyPr wrap="square"/>
+                    <a:lstStyle/>
+                    <a:p>
+                      <a:r>
+                        <a:rPr sz="1000" b="0">
+                          <a:solidFill>
+                            <a:srgbClr val="191D2E"/>
+                          </a:solidFill>
+                          <a:latin typeface="Courier New"/>
+                        </a:rPr>
+                        <a:t/>
+                      </a:r>
+                    </a:p>
+                  </a:txBody>
+                  <a:tcPr>
+                    <a:solidFill>
+                      <a:srgbClr val="F0F0F5"/>
+                    </a:solidFill>
+                  </a:tcPr>
+                </a:tc>
+                <a:tc>
+                  <a:txBody>
+                    <a:bodyPr wrap="square"/>
+                    <a:lstStyle/>
+                    <a:p>
+                      <a:r>
+                        <a:rPr sz="1000" b="0">
+                          <a:solidFill>
+                            <a:srgbClr val="191D2E"/>
+                          </a:solidFill>
+                          <a:latin typeface="Courier New"/>
+                        </a:rPr>
+                        <a:t/>
+                      </a:r>
+                    </a:p>
+                  </a:txBody>
+                  <a:tcPr>
+                    <a:solidFill>
+                      <a:srgbClr val="F0F0F5"/>
+                    </a:solidFill>
+                  </a:tcPr>
+                </a:tc>
+                <a:tc>
+                  <a:txBody>
+                    <a:bodyPr wrap="square"/>
+                    <a:lstStyle/>
+                    <a:p>
+                      <a:r>
+                        <a:rPr sz="1000" b="0">
+                          <a:solidFill>
+                            <a:srgbClr val="191D2E"/>
+                          </a:solidFill>
+                          <a:latin typeface="Courier New"/>
+                        </a:rPr>
+                        <a:t/>
+                      </a:r>
+                    </a:p>
+                  </a:txBody>
+                  <a:tcPr>
+                    <a:solidFill>
+                      <a:srgbClr val="F0F0F5"/>
+                    </a:solidFill>
+                  </a:tcPr>
+                </a:tc>
+                <a:tc>
+                  <a:txBody>
+                    <a:bodyPr wrap="square"/>
+                    <a:lstStyle/>
+                    <a:p>
+                      <a:r>
+                        <a:rPr sz="1000" b="0">
+                          <a:solidFill>
+                            <a:srgbClr val="191D2E"/>
+                          </a:solidFill>
+                          <a:latin typeface="Courier New"/>
+                        </a:rPr>
+                        <a:t/>
+                      </a:r>
+                    </a:p>
+                  </a:txBody>
+                  <a:tcPr>
+                    <a:solidFill>
+                      <a:srgbClr val="F0F0F5"/>
+                    </a:solidFill>
+                  </a:tcPr>
+                </a:tc>
+              </a:tr>
+            </a:tbl>
+          </a:graphicData>
+        </a:graphic>
+      </p:graphicFrame>
     </p:spTree>
   </p:cSld>
   <p:clrMapOvr>
@@ -16610,7 +18010,7 @@
     <p:bg>
       <p:bgPr>
         <a:solidFill>
-          <a:srgbClr val="191D2E"/>
+          <a:srgbClr val="1F2B56"/>
         </a:solidFill>
         <a:effectLst/>
       </p:bgPr>
@@ -18984,7 +20384,7 @@
     <p:bg>
       <p:bgPr>
         <a:solidFill>
-          <a:srgbClr val="191D2E"/>
+          <a:srgbClr val="1F2B56"/>
         </a:solidFill>
         <a:effectLst/>
       </p:bgPr>
@@ -21537,7 +22937,7 @@
                   </a:txBody>
                   <a:tcPr>
                     <a:solidFill>
-                      <a:srgbClr val="191D2E"/>
+                      <a:srgbClr val="1F2B56"/>
                     </a:solidFill>
                   </a:tcPr>
                 </a:tc>
@@ -21559,7 +22959,7 @@
                   </a:txBody>
                   <a:tcPr>
                     <a:solidFill>
-                      <a:srgbClr val="191D2E"/>
+                      <a:srgbClr val="1F2B56"/>
                     </a:solidFill>
                   </a:tcPr>
                 </a:tc>
@@ -21581,7 +22981,7 @@
                   </a:txBody>
                   <a:tcPr>
                     <a:solidFill>
-                      <a:srgbClr val="191D2E"/>
+                      <a:srgbClr val="1F2B56"/>
                     </a:solidFill>
                   </a:tcPr>
                 </a:tc>

--- a/public/downloads/praesentation/M08.pptx
+++ b/public/downloads/praesentation/M08.pptx
@@ -3255,7 +3255,42 @@
       </p:sp>
       <p:sp>
         <p:nvSpPr>
-          <p:cNvPr id="6" name="Rectangle 5"/>
+          <p:cNvPr id="6" name="TextBox 5"/>
+          <p:cNvSpPr txBox="1"/>
+          <p:nvPr/>
+        </p:nvSpPr>
+        <p:spPr>
+          <a:xfrm>
+            <a:off x="685800" y="3977639"/>
+            <a:ext cx="10817352" cy="731520"/>
+          </a:xfrm>
+          <a:prstGeom prst="rect">
+            <a:avLst/>
+          </a:prstGeom>
+          <a:noFill/>
+        </p:spPr>
+        <p:txBody>
+          <a:bodyPr wrap="square">
+            <a:spAutoFit/>
+          </a:bodyPr>
+          <a:lstStyle/>
+          <a:p>
+            <a:pPr algn="l"/>
+            <a:r>
+              <a:rPr sz="1900" b="0" i="1">
+                <a:solidFill>
+                  <a:srgbClr val="BECDE6"/>
+                </a:solidFill>
+                <a:latin typeface="Source Serif 4"/>
+              </a:rPr>
+              <a:t>Bauträger, Bestandshalter und Projektentwickler professionell begleiten</a:t>
+            </a:r>
+          </a:p>
+        </p:txBody>
+      </p:sp>
+      <p:sp>
+        <p:nvSpPr>
+          <p:cNvPr id="7" name="Rectangle 6"/>
           <p:cNvSpPr/>
           <p:nvPr/>
         </p:nvSpPr>
@@ -3298,14 +3333,14 @@
       </p:sp>
       <p:sp>
         <p:nvSpPr>
-          <p:cNvPr id="7" name="TextBox 6"/>
+          <p:cNvPr id="8" name="TextBox 7"/>
           <p:cNvSpPr txBox="1"/>
           <p:nvPr/>
         </p:nvSpPr>
         <p:spPr>
           <a:xfrm>
             <a:off x="685800" y="5193792"/>
-            <a:ext cx="5408676" cy="201168"/>
+            <a:ext cx="3605784" cy="201168"/>
           </a:xfrm>
           <a:prstGeom prst="rect">
             <a:avLst/>
@@ -3333,14 +3368,14 @@
       </p:sp>
       <p:sp>
         <p:nvSpPr>
-          <p:cNvPr id="8" name="TextBox 7"/>
+          <p:cNvPr id="9" name="TextBox 8"/>
           <p:cNvSpPr txBox="1"/>
           <p:nvPr/>
         </p:nvSpPr>
         <p:spPr>
           <a:xfrm>
             <a:off x="685800" y="5394960"/>
-            <a:ext cx="5408676" cy="320040"/>
+            <a:ext cx="3605784" cy="320040"/>
           </a:xfrm>
           <a:prstGeom prst="rect">
             <a:avLst/>
@@ -3368,14 +3403,14 @@
       </p:sp>
       <p:sp>
         <p:nvSpPr>
-          <p:cNvPr id="9" name="TextBox 8"/>
+          <p:cNvPr id="10" name="TextBox 9"/>
           <p:cNvSpPr txBox="1"/>
           <p:nvPr/>
         </p:nvSpPr>
         <p:spPr>
           <a:xfrm>
-            <a:off x="6094476" y="5193792"/>
-            <a:ext cx="5408676" cy="201168"/>
+            <a:off x="4291584" y="5193792"/>
+            <a:ext cx="3605784" cy="201168"/>
           </a:xfrm>
           <a:prstGeom prst="rect">
             <a:avLst/>
@@ -3396,21 +3431,21 @@
                 </a:solidFill>
                 <a:latin typeface="JetBrains Mono"/>
               </a:rPr>
-              <a:t>VERSION</a:t>
-            </a:r>
-          </a:p>
-        </p:txBody>
-      </p:sp>
-      <p:sp>
-        <p:nvSpPr>
-          <p:cNvPr id="10" name="TextBox 9"/>
+              <a:t>KOMPETENZSTUFE</a:t>
+            </a:r>
+          </a:p>
+        </p:txBody>
+      </p:sp>
+      <p:sp>
+        <p:nvSpPr>
+          <p:cNvPr id="11" name="TextBox 10"/>
           <p:cNvSpPr txBox="1"/>
           <p:nvPr/>
         </p:nvSpPr>
         <p:spPr>
           <a:xfrm>
-            <a:off x="6094476" y="5394960"/>
-            <a:ext cx="5408676" cy="320040"/>
+            <a:off x="4291584" y="5394960"/>
+            <a:ext cx="3605784" cy="320040"/>
           </a:xfrm>
           <a:prstGeom prst="rect">
             <a:avLst/>
@@ -3431,6 +3466,76 @@
                 </a:solidFill>
                 <a:latin typeface="Arial"/>
               </a:rPr>
+              <a:t>Sparringspartner</a:t>
+            </a:r>
+          </a:p>
+        </p:txBody>
+      </p:sp>
+      <p:sp>
+        <p:nvSpPr>
+          <p:cNvPr id="12" name="TextBox 11"/>
+          <p:cNvSpPr txBox="1"/>
+          <p:nvPr/>
+        </p:nvSpPr>
+        <p:spPr>
+          <a:xfrm>
+            <a:off x="7897368" y="5193792"/>
+            <a:ext cx="3605784" cy="201168"/>
+          </a:xfrm>
+          <a:prstGeom prst="rect">
+            <a:avLst/>
+          </a:prstGeom>
+          <a:noFill/>
+        </p:spPr>
+        <p:txBody>
+          <a:bodyPr wrap="none">
+            <a:spAutoFit/>
+          </a:bodyPr>
+          <a:lstStyle/>
+          <a:p>
+            <a:pPr algn="l"/>
+            <a:r>
+              <a:rPr sz="700">
+                <a:solidFill>
+                  <a:srgbClr val="A0B4D2"/>
+                </a:solidFill>
+                <a:latin typeface="JetBrains Mono"/>
+              </a:rPr>
+              <a:t>VERSION</a:t>
+            </a:r>
+          </a:p>
+        </p:txBody>
+      </p:sp>
+      <p:sp>
+        <p:nvSpPr>
+          <p:cNvPr id="13" name="TextBox 12"/>
+          <p:cNvSpPr txBox="1"/>
+          <p:nvPr/>
+        </p:nvSpPr>
+        <p:spPr>
+          <a:xfrm>
+            <a:off x="7897368" y="5394960"/>
+            <a:ext cx="3605784" cy="320040"/>
+          </a:xfrm>
+          <a:prstGeom prst="rect">
+            <a:avLst/>
+          </a:prstGeom>
+          <a:noFill/>
+        </p:spPr>
+        <p:txBody>
+          <a:bodyPr wrap="square">
+            <a:spAutoFit/>
+          </a:bodyPr>
+          <a:lstStyle/>
+          <a:p>
+            <a:pPr algn="l"/>
+            <a:r>
+              <a:rPr sz="1100" b="0" i="0">
+                <a:solidFill>
+                  <a:srgbClr val="FFFFFF"/>
+                </a:solidFill>
+                <a:latin typeface="Arial"/>
+              </a:rPr>
               <a:t>v0.3</a:t>
             </a:r>
           </a:p>
@@ -3438,7 +3543,7 @@
       </p:sp>
       <p:sp>
         <p:nvSpPr>
-          <p:cNvPr id="11" name="Rectangle 10"/>
+          <p:cNvPr id="14" name="Rectangle 13"/>
           <p:cNvSpPr/>
           <p:nvPr/>
         </p:nvSpPr>
@@ -3481,7 +3586,7 @@
       </p:sp>
       <p:sp>
         <p:nvSpPr>
-          <p:cNvPr id="12" name="TextBox 11"/>
+          <p:cNvPr id="15" name="TextBox 14"/>
           <p:cNvSpPr txBox="1"/>
           <p:nvPr/>
         </p:nvSpPr>
@@ -3516,7 +3621,7 @@
       </p:sp>
       <p:sp>
         <p:nvSpPr>
-          <p:cNvPr id="13" name="TextBox 12"/>
+          <p:cNvPr id="16" name="TextBox 15"/>
           <p:cNvSpPr txBox="1"/>
           <p:nvPr/>
         </p:nvSpPr>
